--- a/assets/pptx/catalog-114.pptx
+++ b/assets/pptx/catalog-114.pptx
@@ -3553,7 +3553,7 @@
                 <a:ea typeface="Ebrima"/>
                 <a:cs typeface="Ebrima"/>
               </a:rPr>
-              <a:t>ስለዚህ ትበቃኛለህ ሁልጊዜ ታስመካኛለህ (2x)</a:t>
+              <a:t>ስለዚህ ትበቃኛለህ ሁልጊዜ ታስመካኛለህ 2x</a:t>
             </a:r>
           </a:p>
         </p:txBody>
@@ -3754,7 +3754,7 @@
                 <a:ea typeface="Ebrima"/>
                 <a:cs typeface="Ebrima"/>
               </a:rPr>
-              <a:t>(2x)</a:t>
+              <a:t>2x</a:t>
             </a:r>
           </a:p>
         </p:txBody>
@@ -4022,7 +4022,7 @@
                 <a:ea typeface="Ebrima"/>
                 <a:cs typeface="Ebrima"/>
               </a:rPr>
-              <a:t>(2x)</a:t>
+              <a:t>2x</a:t>
             </a:r>
           </a:p>
         </p:txBody>
@@ -4223,7 +4223,7 @@
                 <a:ea typeface="Ebrima"/>
                 <a:cs typeface="Ebrima"/>
               </a:rPr>
-              <a:t>(2x)</a:t>
+              <a:t>2x</a:t>
             </a:r>
           </a:p>
         </p:txBody>
@@ -4424,7 +4424,7 @@
                 <a:ea typeface="Ebrima"/>
                 <a:cs typeface="Ebrima"/>
               </a:rPr>
-              <a:t>(2x)</a:t>
+              <a:t>2x</a:t>
             </a:r>
           </a:p>
         </p:txBody>
@@ -4491,7 +4491,7 @@
                 <a:ea typeface="Ebrima"/>
                 <a:cs typeface="Ebrima"/>
               </a:rPr>
-              <a:t>የእኔ ጌታ ተባረክልኝ (3x) ሌላማ ምን እልሃለሁ ተባረክልኝ (2x)</a:t>
+              <a:t>የእኔ ጌታ ተባረክልኝ 3x ሌላማ ምን እልሃለሁ ተባረክልኝ 2x</a:t>
             </a:r>
           </a:p>
         </p:txBody>
@@ -4692,7 +4692,7 @@
                 <a:ea typeface="Ebrima"/>
                 <a:cs typeface="Ebrima"/>
               </a:rPr>
-              <a:t>ያረከው አንተ ሆንክልኝ ድንቅ (2x)</a:t>
+              <a:t>ያረከው አንተ ሆንክልኝ ድንቅ 2x</a:t>
             </a:r>
           </a:p>
         </p:txBody>
@@ -4759,7 +4759,7 @@
                 <a:ea typeface="Ebrima"/>
                 <a:cs typeface="Ebrima"/>
               </a:rPr>
-              <a:t>(2x)</a:t>
+              <a:t>2x</a:t>
             </a:r>
           </a:p>
         </p:txBody>
@@ -4960,7 +4960,7 @@
                 <a:ea typeface="Ebrima"/>
                 <a:cs typeface="Ebrima"/>
               </a:rPr>
-              <a:t>(2x)</a:t>
+              <a:t>2x</a:t>
             </a:r>
           </a:p>
         </p:txBody>
@@ -5161,7 +5161,7 @@
                 <a:ea typeface="Ebrima"/>
                 <a:cs typeface="Ebrima"/>
               </a:rPr>
-              <a:t>(2x)</a:t>
+              <a:t>2x</a:t>
             </a:r>
           </a:p>
         </p:txBody>
@@ -5362,7 +5362,7 @@
                 <a:ea typeface="Ebrima"/>
                 <a:cs typeface="Ebrima"/>
               </a:rPr>
-              <a:t>(2x)</a:t>
+              <a:t>2x</a:t>
             </a:r>
           </a:p>
         </p:txBody>
@@ -5429,7 +5429,7 @@
                 <a:ea typeface="Ebrima"/>
                 <a:cs typeface="Ebrima"/>
               </a:rPr>
-              <a:t>ስለዚህ ትበቃኛለህ ሁልጊዜ ታስመካኛለህ (2x)</a:t>
+              <a:t>ስለዚህ ትበቃኛለህ ሁልጊዜ ታስመካኛለህ 2x</a:t>
             </a:r>
           </a:p>
         </p:txBody>
@@ -5496,7 +5496,7 @@
                 <a:ea typeface="Ebrima"/>
                 <a:cs typeface="Ebrima"/>
               </a:rPr>
-              <a:t>የእኔ ጌታ ተባረክልኝ (3x) ሌላማ ምን እልሃለሁ ተባረክልኝ (2x)</a:t>
+              <a:t>የእኔ ጌታ ተባረክልኝ 3x ሌላማ ምን እልሃለሁ ተባረክልኝ 2x</a:t>
             </a:r>
           </a:p>
         </p:txBody>
@@ -5630,7 +5630,7 @@
                 <a:ea typeface="Ebrima"/>
                 <a:cs typeface="Ebrima"/>
               </a:rPr>
-              <a:t>ቸርነትህን ዘለዓለም ዘምራለሁ (2x)</a:t>
+              <a:t>ቸርነትህን ዘለዓለም ዘምራለሁ 2x</a:t>
             </a:r>
           </a:p>
         </p:txBody>
@@ -5697,7 +5697,7 @@
                 <a:ea typeface="Ebrima"/>
                 <a:cs typeface="Ebrima"/>
               </a:rPr>
-              <a:t>ሌላማ ምን እልሃለሁ ጌታዬ ሳከብርህ ያኔ ረካለሁ አምላኬ (2x)</a:t>
+              <a:t>ሌላማ ምን እልሃለሁ ጌታዬ ሳከብርህ ያኔ ረካለሁ አምላኬ 2x</a:t>
             </a:r>
           </a:p>
         </p:txBody>
@@ -5831,7 +5831,7 @@
                 <a:ea typeface="Ebrima"/>
                 <a:cs typeface="Ebrima"/>
               </a:rPr>
-              <a:t>ቸርነትህን ዘለዓለም ዘምራለሁ (2x)</a:t>
+              <a:t>ቸርነትህን ዘለዓለም ዘምራለሁ 2x</a:t>
             </a:r>
           </a:p>
         </p:txBody>
@@ -5898,7 +5898,7 @@
                 <a:ea typeface="Ebrima"/>
                 <a:cs typeface="Ebrima"/>
               </a:rPr>
-              <a:t>ሌላማ ምን እልሃለሁ ጌታዬ ሳከብርህ ያኔ ረካለሁ አምላኬ (2x)</a:t>
+              <a:t>ሌላማ ምን እልሃለሁ ጌታዬ ሳከብርህ ያኔ ረካለሁ አምላኬ 2x</a:t>
             </a:r>
           </a:p>
         </p:txBody>
@@ -6233,7 +6233,7 @@
                 <a:ea typeface="Ebrima"/>
                 <a:cs typeface="Ebrima"/>
               </a:rPr>
-              <a:t>ስለዚህ ትበቃኛለህ ሁልጊዜ ታስመካኛለህ (2x)</a:t>
+              <a:t>ስለዚህ ትበቃኛለህ ሁልጊዜ ታስመካኛለህ 2x</a:t>
             </a:r>
           </a:p>
         </p:txBody>
